--- a/plan/React-App-Scaffold-저작권등록-상담자료.pptx
+++ b/plan/React-App-Scaffold-저작권등록-상담자료.pptx
@@ -548,7 +548,17 @@
                 <a:latin typeface="Malgun Gothic"/>
                 <a:ea typeface="Malgun Gothic"/>
               </a:rPr>
-              <a:t>React App Scaffold</a:t>
+              <a:t>React </a:t>
+            </a:r>
+            <a:r>
+              <a:rPr lang="ko-KR" sz="4000" b="1" dirty="0" err="1">
+                <a:solidFill>
+                  <a:srgbClr val="FFFFFF"/>
+                </a:solidFill>
+                <a:latin typeface="Malgun Gothic"/>
+                <a:ea typeface="Malgun Gothic"/>
+              </a:rPr>
+              <a:t>App</a:t>
             </a:r>
             <a:r>
               <a:rPr lang="ko-KR" sz="4000" b="1" dirty="0">
@@ -558,7 +568,27 @@
                 <a:latin typeface="Malgun Gothic"/>
                 <a:ea typeface="Malgun Gothic"/>
               </a:rPr>
-              <a:t> 저작권 상담 자료</a:t>
+              <a:t> </a:t>
+            </a:r>
+            <a:r>
+              <a:rPr lang="ko-KR" sz="4000" b="1" dirty="0" err="1">
+                <a:solidFill>
+                  <a:srgbClr val="FFFFFF"/>
+                </a:solidFill>
+                <a:latin typeface="Malgun Gothic"/>
+                <a:ea typeface="Malgun Gothic"/>
+              </a:rPr>
+              <a:t>Scaffold</a:t>
+            </a:r>
+            <a:r>
+              <a:rPr lang="ko-KR" sz="4000" b="1" dirty="0">
+                <a:solidFill>
+                  <a:srgbClr val="FFFFFF"/>
+                </a:solidFill>
+                <a:latin typeface="Malgun Gothic"/>
+                <a:ea typeface="Malgun Gothic"/>
+              </a:rPr>
+              <a:t> 상담 자료</a:t>
             </a:r>
           </a:p>
         </p:txBody>
@@ -6873,45 +6903,6 @@
       </p:sp>
       <p:sp>
         <p:nvSpPr>
-          <p:cNvPr id="4" name="s4"/>
-          <p:cNvSpPr/>
-          <p:nvPr/>
-        </p:nvSpPr>
-        <p:spPr>
-          <a:xfrm>
-            <a:off x="1420000" y="940000"/>
-            <a:ext cx="9600000" cy="340000"/>
-          </a:xfrm>
-          <a:prstGeom prst="rect">
-            <a:avLst/>
-          </a:prstGeom>
-          <a:noFill/>
-          <a:ln>
-            <a:noFill/>
-          </a:ln>
-        </p:spPr>
-        <p:txBody>
-          <a:bodyPr wrap="square" lIns="108000" tIns="46800" rIns="108000" bIns="46800" anchor="ctr"/>
-          <a:lstStyle/>
-          <a:p>
-            <a:pPr algn="l">
-              <a:buNone/>
-            </a:pPr>
-            <a:r>
-              <a:rPr lang="ko-KR" sz="1250" dirty="0">
-                <a:solidFill>
-                  <a:srgbClr val="595959"/>
-                </a:solidFill>
-                <a:latin typeface="Malgun Gothic"/>
-                <a:ea typeface="Malgun Gothic"/>
-              </a:rPr>
-              <a:t>결론부터 말씀드리면, 특허가 아니라 저작권 쪽으로 방향을 잡고 왔습니다</a:t>
-            </a:r>
-          </a:p>
-        </p:txBody>
-      </p:sp>
-      <p:sp>
-        <p:nvSpPr>
           <p:cNvPr id="5" name="s5"/>
           <p:cNvSpPr/>
           <p:nvPr/>
@@ -6977,17 +6968,7 @@
                 <a:latin typeface="Malgun Gothic"/>
                 <a:ea typeface="Malgun Gothic"/>
               </a:rPr>
-              <a:t>무엇을 만들었나</a:t>
-            </a:r>
-            <a:r>
-              <a:rPr lang="ko-KR" sz="1700" b="1" dirty="0">
-                <a:solidFill>
-                  <a:srgbClr val="1F3864"/>
-                </a:solidFill>
-                <a:latin typeface="Malgun Gothic"/>
-                <a:ea typeface="Malgun Gothic"/>
-              </a:rPr>
-              <a:t> (사내 표준 React 스캐폴드)</a:t>
+              <a:t>무엇을 만들었나 (사내 표준 React 스캐폴드)</a:t>
             </a:r>
           </a:p>
           <a:p>
@@ -7209,7 +7190,37 @@
                 <a:latin typeface="Malgun Gothic"/>
                 <a:ea typeface="Malgun Gothic"/>
               </a:rPr>
-              <a:t>특허는 어렵다고 스스로 판단했습니다. 저작권(프로그램) 등록이 맞는 선택인지, 등록 전에 무엇을 정리해야 하는지 여쭙습니다</a:t>
+              <a:t>특허</a:t>
+            </a:r>
+            <a:r>
+              <a:rPr lang="en-US" altLang="ko-KR" sz="1250" dirty="0">
+                <a:solidFill>
+                  <a:srgbClr val="595959"/>
+                </a:solidFill>
+                <a:latin typeface="Malgun Gothic"/>
+                <a:ea typeface="Malgun Gothic"/>
+              </a:rPr>
+              <a:t> </a:t>
+            </a:r>
+            <a:r>
+              <a:rPr lang="ko-KR" altLang="en-US" sz="1250" dirty="0">
+                <a:solidFill>
+                  <a:srgbClr val="595959"/>
+                </a:solidFill>
+                <a:latin typeface="Malgun Gothic"/>
+                <a:ea typeface="Malgun Gothic"/>
+              </a:rPr>
+              <a:t>및 </a:t>
+            </a:r>
+            <a:r>
+              <a:rPr lang="ko-KR" sz="1250" dirty="0">
+                <a:solidFill>
+                  <a:srgbClr val="595959"/>
+                </a:solidFill>
+                <a:latin typeface="Malgun Gothic"/>
+                <a:ea typeface="Malgun Gothic"/>
+              </a:rPr>
+              <a:t>저작권(프로그램) 등록이 맞는 선택인지, 등록 전에 무엇을 정리해야 하는지 여쭙습니다</a:t>
             </a:r>
           </a:p>
         </p:txBody>
